--- a/presentation/CardioCog_final_review.pptx
+++ b/presentation/CardioCog_final_review.pptx
@@ -3441,7 +3441,7 @@
                 </a:solidFill>
                 <a:latin typeface="Calibri"/>
               </a:rPr>
-              <a:t>Supervisor: Dr. Manoj Bhat K, Professor</a:t>
+              <a:t>Supervisor: Dr. Manoj Bhat K, Assistant Professor</a:t>
             </a:r>
           </a:p>
         </p:txBody>
